--- a/_dev/Feedback/Consultant/27-Oct/10_26_2026_Update_For_Digital_Simulation.pptx
+++ b/_dev/Feedback/Consultant/27-Oct/10_26_2026_Update_For_Digital_Simulation.pptx
@@ -544,7 +544,7 @@
           <a:p>
             <a:fld id="{4C870BA3-8C99-4885-9116-D5C1F7B5A430}" type="datetimeFigureOut">
               <a:rPr lang="en-US" smtClean="0"/>
-              <a:t>10/26/2026</a:t>
+              <a:t>10/27/2026</a:t>
             </a:fld>
             <a:endParaRPr lang="en-US"/>
           </a:p>
@@ -1606,7 +1606,7 @@
           <a:p>
             <a:fld id="{C509D815-375B-4E25-982C-DE08947284A2}" type="datetimeFigureOut">
               <a:rPr lang="en-US" smtClean="0"/>
-              <a:t>10/26/2026</a:t>
+              <a:t>10/27/2026</a:t>
             </a:fld>
             <a:endParaRPr lang="en-US"/>
           </a:p>
@@ -1804,7 +1804,7 @@
           <a:p>
             <a:fld id="{C509D815-375B-4E25-982C-DE08947284A2}" type="datetimeFigureOut">
               <a:rPr lang="en-US" smtClean="0"/>
-              <a:t>10/26/2026</a:t>
+              <a:t>10/27/2026</a:t>
             </a:fld>
             <a:endParaRPr lang="en-US"/>
           </a:p>
@@ -2012,7 +2012,7 @@
           <a:p>
             <a:fld id="{C509D815-375B-4E25-982C-DE08947284A2}" type="datetimeFigureOut">
               <a:rPr lang="en-US" smtClean="0"/>
-              <a:t>10/26/2026</a:t>
+              <a:t>10/27/2026</a:t>
             </a:fld>
             <a:endParaRPr lang="en-US"/>
           </a:p>
@@ -3684,7 +3684,7 @@
           <a:p>
             <a:fld id="{5BCAD085-E8A6-8845-BD4E-CB4CCA059FC4}" type="datetimeFigureOut">
               <a:rPr lang="en-US" smtClean="0"/>
-              <a:t>10/26/2026</a:t>
+              <a:t>10/27/2026</a:t>
             </a:fld>
             <a:endParaRPr lang="en-US"/>
           </a:p>
@@ -10022,7 +10022,7 @@
           <a:p>
             <a:fld id="{C509D815-375B-4E25-982C-DE08947284A2}" type="datetimeFigureOut">
               <a:rPr lang="en-US" smtClean="0"/>
-              <a:t>10/26/2026</a:t>
+              <a:t>10/27/2026</a:t>
             </a:fld>
             <a:endParaRPr lang="en-US"/>
           </a:p>
@@ -16608,7 +16608,7 @@
           <a:p>
             <a:fld id="{C509D815-375B-4E25-982C-DE08947284A2}" type="datetimeFigureOut">
               <a:rPr lang="en-US" smtClean="0"/>
-              <a:t>10/26/2026</a:t>
+              <a:t>10/27/2026</a:t>
             </a:fld>
             <a:endParaRPr lang="en-US"/>
           </a:p>
@@ -16873,7 +16873,7 @@
           <a:p>
             <a:fld id="{C509D815-375B-4E25-982C-DE08947284A2}" type="datetimeFigureOut">
               <a:rPr lang="en-US" smtClean="0"/>
-              <a:t>10/26/2026</a:t>
+              <a:t>10/27/2026</a:t>
             </a:fld>
             <a:endParaRPr lang="en-US"/>
           </a:p>
@@ -17285,7 +17285,7 @@
           <a:p>
             <a:fld id="{C509D815-375B-4E25-982C-DE08947284A2}" type="datetimeFigureOut">
               <a:rPr lang="en-US" smtClean="0"/>
-              <a:t>10/26/2026</a:t>
+              <a:t>10/27/2026</a:t>
             </a:fld>
             <a:endParaRPr lang="en-US"/>
           </a:p>
@@ -17426,7 +17426,7 @@
           <a:p>
             <a:fld id="{C509D815-375B-4E25-982C-DE08947284A2}" type="datetimeFigureOut">
               <a:rPr lang="en-US" smtClean="0"/>
-              <a:t>10/26/2026</a:t>
+              <a:t>10/27/2026</a:t>
             </a:fld>
             <a:endParaRPr lang="en-US"/>
           </a:p>
@@ -17539,7 +17539,7 @@
           <a:p>
             <a:fld id="{C509D815-375B-4E25-982C-DE08947284A2}" type="datetimeFigureOut">
               <a:rPr lang="en-US" smtClean="0"/>
-              <a:t>10/26/2026</a:t>
+              <a:t>10/27/2026</a:t>
             </a:fld>
             <a:endParaRPr lang="en-US"/>
           </a:p>
@@ -17850,7 +17850,7 @@
           <a:p>
             <a:fld id="{C509D815-375B-4E25-982C-DE08947284A2}" type="datetimeFigureOut">
               <a:rPr lang="en-US" smtClean="0"/>
-              <a:t>10/26/2026</a:t>
+              <a:t>10/27/2026</a:t>
             </a:fld>
             <a:endParaRPr lang="en-US"/>
           </a:p>
@@ -18138,7 +18138,7 @@
           <a:p>
             <a:fld id="{C509D815-375B-4E25-982C-DE08947284A2}" type="datetimeFigureOut">
               <a:rPr lang="en-US" smtClean="0"/>
-              <a:t>10/26/2026</a:t>
+              <a:t>10/27/2026</a:t>
             </a:fld>
             <a:endParaRPr lang="en-US"/>
           </a:p>
@@ -18379,7 +18379,7 @@
           <a:p>
             <a:fld id="{C509D815-375B-4E25-982C-DE08947284A2}" type="datetimeFigureOut">
               <a:rPr lang="en-US" smtClean="0"/>
-              <a:t>10/26/2026</a:t>
+              <a:t>10/27/2026</a:t>
             </a:fld>
             <a:endParaRPr lang="en-US"/>
           </a:p>
@@ -20331,6 +20331,44 @@
           </a:p>
         </p:txBody>
       </p:sp>
+      <p:sp>
+        <p:nvSpPr>
+          <p:cNvPr id="2" name="TextBox 1">
+            <a:extLst>
+              <a:ext uri="{FF2B5EF4-FFF2-40B4-BE49-F238E27FC236}">
+                <a16:creationId xmlns:a16="http://schemas.microsoft.com/office/drawing/2014/main" id="{7A77FEAF-9526-D1BB-C0EE-CBC1AACC1579}"/>
+              </a:ext>
+            </a:extLst>
+          </p:cNvPr>
+          <p:cNvSpPr txBox="1"/>
+          <p:nvPr/>
+        </p:nvSpPr>
+        <p:spPr>
+          <a:xfrm>
+            <a:off x="9027460" y="1264023"/>
+            <a:ext cx="2859741" cy="369332"/>
+          </a:xfrm>
+          <a:prstGeom prst="rect">
+            <a:avLst/>
+          </a:prstGeom>
+          <a:solidFill>
+            <a:srgbClr val="92D050"/>
+          </a:solidFill>
+        </p:spPr>
+        <p:txBody>
+          <a:bodyPr wrap="square" rtlCol="0">
+            <a:spAutoFit/>
+          </a:bodyPr>
+          <a:lstStyle/>
+          <a:p>
+            <a:r>
+              <a:rPr lang="en-US" dirty="0"/>
+              <a:t>Digital 27 Oct 2026 - Done</a:t>
+            </a:r>
+            <a:endParaRPr lang="en-IN" dirty="0"/>
+          </a:p>
+        </p:txBody>
+      </p:sp>
     </p:spTree>
     <p:extLst>
       <p:ext uri="{BB962C8B-B14F-4D97-AF65-F5344CB8AC3E}">
@@ -20533,6 +20571,44 @@
           </a:p>
         </p:txBody>
       </p:sp>
+      <p:sp>
+        <p:nvSpPr>
+          <p:cNvPr id="5" name="TextBox 4">
+            <a:extLst>
+              <a:ext uri="{FF2B5EF4-FFF2-40B4-BE49-F238E27FC236}">
+                <a16:creationId xmlns:a16="http://schemas.microsoft.com/office/drawing/2014/main" id="{0C88C6F0-5DAB-D050-845C-E5DDF4410DA5}"/>
+              </a:ext>
+            </a:extLst>
+          </p:cNvPr>
+          <p:cNvSpPr txBox="1"/>
+          <p:nvPr/>
+        </p:nvSpPr>
+        <p:spPr>
+          <a:xfrm>
+            <a:off x="7091082" y="412519"/>
+            <a:ext cx="4114802" cy="369332"/>
+          </a:xfrm>
+          <a:prstGeom prst="rect">
+            <a:avLst/>
+          </a:prstGeom>
+          <a:solidFill>
+            <a:srgbClr val="FFFF00"/>
+          </a:solidFill>
+        </p:spPr>
+        <p:txBody>
+          <a:bodyPr wrap="square" rtlCol="0">
+            <a:spAutoFit/>
+          </a:bodyPr>
+          <a:lstStyle/>
+          <a:p>
+            <a:r>
+              <a:rPr lang="en-US" dirty="0"/>
+              <a:t>Digital 27 Oct 2026 – No updates</a:t>
+            </a:r>
+            <a:endParaRPr lang="en-IN" dirty="0"/>
+          </a:p>
+        </p:txBody>
+      </p:sp>
     </p:spTree>
     <p:extLst>
       <p:ext uri="{BB962C8B-B14F-4D97-AF65-F5344CB8AC3E}">
@@ -20710,6 +20786,44 @@
               <a:rPr lang="en-US"/>
               <a:t>Source doc Moment 1</a:t>
             </a:r>
+          </a:p>
+        </p:txBody>
+      </p:sp>
+      <p:sp>
+        <p:nvSpPr>
+          <p:cNvPr id="5" name="TextBox 4">
+            <a:extLst>
+              <a:ext uri="{FF2B5EF4-FFF2-40B4-BE49-F238E27FC236}">
+                <a16:creationId xmlns:a16="http://schemas.microsoft.com/office/drawing/2014/main" id="{D3B3975C-A736-0ED4-A7F6-AD7C75A30FA9}"/>
+              </a:ext>
+            </a:extLst>
+          </p:cNvPr>
+          <p:cNvSpPr txBox="1"/>
+          <p:nvPr/>
+        </p:nvSpPr>
+        <p:spPr>
+          <a:xfrm>
+            <a:off x="7091082" y="412519"/>
+            <a:ext cx="4114802" cy="369332"/>
+          </a:xfrm>
+          <a:prstGeom prst="rect">
+            <a:avLst/>
+          </a:prstGeom>
+          <a:solidFill>
+            <a:srgbClr val="FFFF00"/>
+          </a:solidFill>
+        </p:spPr>
+        <p:txBody>
+          <a:bodyPr wrap="square" rtlCol="0">
+            <a:spAutoFit/>
+          </a:bodyPr>
+          <a:lstStyle/>
+          <a:p>
+            <a:r>
+              <a:rPr lang="en-US" dirty="0"/>
+              <a:t>Digital 27 Oct 2026 – No updates</a:t>
+            </a:r>
+            <a:endParaRPr lang="en-IN" dirty="0"/>
           </a:p>
         </p:txBody>
       </p:sp>
@@ -20902,6 +21016,44 @@
           </a:p>
         </p:txBody>
       </p:sp>
+      <p:sp>
+        <p:nvSpPr>
+          <p:cNvPr id="5" name="TextBox 4">
+            <a:extLst>
+              <a:ext uri="{FF2B5EF4-FFF2-40B4-BE49-F238E27FC236}">
+                <a16:creationId xmlns:a16="http://schemas.microsoft.com/office/drawing/2014/main" id="{2B9DA7DD-214C-B64F-486F-B9F43A1C1D44}"/>
+              </a:ext>
+            </a:extLst>
+          </p:cNvPr>
+          <p:cNvSpPr txBox="1"/>
+          <p:nvPr/>
+        </p:nvSpPr>
+        <p:spPr>
+          <a:xfrm>
+            <a:off x="8821272" y="381001"/>
+            <a:ext cx="2859741" cy="369332"/>
+          </a:xfrm>
+          <a:prstGeom prst="rect">
+            <a:avLst/>
+          </a:prstGeom>
+          <a:solidFill>
+            <a:srgbClr val="92D050"/>
+          </a:solidFill>
+        </p:spPr>
+        <p:txBody>
+          <a:bodyPr wrap="square" rtlCol="0">
+            <a:spAutoFit/>
+          </a:bodyPr>
+          <a:lstStyle/>
+          <a:p>
+            <a:r>
+              <a:rPr lang="en-US" dirty="0"/>
+              <a:t>Digital 27 Oct 2026 - Done</a:t>
+            </a:r>
+            <a:endParaRPr lang="en-IN" dirty="0"/>
+          </a:p>
+        </p:txBody>
+      </p:sp>
     </p:spTree>
     <p:extLst>
       <p:ext uri="{BB962C8B-B14F-4D97-AF65-F5344CB8AC3E}">
@@ -21066,6 +21218,44 @@
               <a:rPr lang="en-US"/>
               <a:t>Source Doc Moment 2</a:t>
             </a:r>
+          </a:p>
+        </p:txBody>
+      </p:sp>
+      <p:sp>
+        <p:nvSpPr>
+          <p:cNvPr id="5" name="TextBox 4">
+            <a:extLst>
+              <a:ext uri="{FF2B5EF4-FFF2-40B4-BE49-F238E27FC236}">
+                <a16:creationId xmlns:a16="http://schemas.microsoft.com/office/drawing/2014/main" id="{ED5A874B-20A7-1180-480B-BC6BC43CEEF2}"/>
+              </a:ext>
+            </a:extLst>
+          </p:cNvPr>
+          <p:cNvSpPr txBox="1"/>
+          <p:nvPr/>
+        </p:nvSpPr>
+        <p:spPr>
+          <a:xfrm>
+            <a:off x="7091082" y="412519"/>
+            <a:ext cx="4114802" cy="369332"/>
+          </a:xfrm>
+          <a:prstGeom prst="rect">
+            <a:avLst/>
+          </a:prstGeom>
+          <a:solidFill>
+            <a:srgbClr val="FFFF00"/>
+          </a:solidFill>
+        </p:spPr>
+        <p:txBody>
+          <a:bodyPr wrap="square" rtlCol="0">
+            <a:spAutoFit/>
+          </a:bodyPr>
+          <a:lstStyle/>
+          <a:p>
+            <a:r>
+              <a:rPr lang="en-US" dirty="0"/>
+              <a:t>Digital 27 Oct 2026 – No updates</a:t>
+            </a:r>
+            <a:endParaRPr lang="en-IN" dirty="0"/>
           </a:p>
         </p:txBody>
       </p:sp>
@@ -21243,6 +21433,44 @@
               <a:rPr lang="en-US"/>
               <a:t>Source Doc: Moment 3</a:t>
             </a:r>
+          </a:p>
+        </p:txBody>
+      </p:sp>
+      <p:sp>
+        <p:nvSpPr>
+          <p:cNvPr id="5" name="TextBox 4">
+            <a:extLst>
+              <a:ext uri="{FF2B5EF4-FFF2-40B4-BE49-F238E27FC236}">
+                <a16:creationId xmlns:a16="http://schemas.microsoft.com/office/drawing/2014/main" id="{75707283-DFFA-8FC5-E8D2-1307078FD003}"/>
+              </a:ext>
+            </a:extLst>
+          </p:cNvPr>
+          <p:cNvSpPr txBox="1"/>
+          <p:nvPr/>
+        </p:nvSpPr>
+        <p:spPr>
+          <a:xfrm>
+            <a:off x="7091082" y="412519"/>
+            <a:ext cx="4114802" cy="369332"/>
+          </a:xfrm>
+          <a:prstGeom prst="rect">
+            <a:avLst/>
+          </a:prstGeom>
+          <a:solidFill>
+            <a:srgbClr val="FFFF00"/>
+          </a:solidFill>
+        </p:spPr>
+        <p:txBody>
+          <a:bodyPr wrap="square" rtlCol="0">
+            <a:spAutoFit/>
+          </a:bodyPr>
+          <a:lstStyle/>
+          <a:p>
+            <a:r>
+              <a:rPr lang="en-US" dirty="0"/>
+              <a:t>Digital 27 Oct 2026 – No updates</a:t>
+            </a:r>
+            <a:endParaRPr lang="en-IN" dirty="0"/>
           </a:p>
         </p:txBody>
       </p:sp>
@@ -21437,13 +21665,58 @@
             </a:br>
             <a:r>
               <a:rPr lang="en-US" dirty="0"/>
-              <a:t>Bot </a:t>
+              <a:t>Bot Language Update</a:t>
+            </a:r>
+            <a:endParaRPr lang="en-US" i="1" dirty="0"/>
+          </a:p>
+        </p:txBody>
+      </p:sp>
+      <p:sp>
+        <p:nvSpPr>
+          <p:cNvPr id="5" name="TextBox 4">
+            <a:extLst>
+              <a:ext uri="{FF2B5EF4-FFF2-40B4-BE49-F238E27FC236}">
+                <a16:creationId xmlns:a16="http://schemas.microsoft.com/office/drawing/2014/main" id="{B15219C6-73EE-A161-638F-EB129A80D402}"/>
+              </a:ext>
+            </a:extLst>
+          </p:cNvPr>
+          <p:cNvSpPr txBox="1"/>
+          <p:nvPr/>
+        </p:nvSpPr>
+        <p:spPr>
+          <a:xfrm>
+            <a:off x="8650942" y="272672"/>
+            <a:ext cx="2859741" cy="1200329"/>
+          </a:xfrm>
+          <a:prstGeom prst="rect">
+            <a:avLst/>
+          </a:prstGeom>
+          <a:solidFill>
+            <a:srgbClr val="92D050"/>
+          </a:solidFill>
+        </p:spPr>
+        <p:txBody>
+          <a:bodyPr wrap="square" rtlCol="0">
+            <a:spAutoFit/>
+          </a:bodyPr>
+          <a:lstStyle/>
+          <a:p>
+            <a:r>
+              <a:rPr lang="en-US" dirty="0"/>
+              <a:t>Digital 27 Oct 2026 – Updated  bot title as</a:t>
+            </a:r>
+            <a:br>
+              <a:rPr lang="en-US" dirty="0"/>
+            </a:br>
+            <a:r>
+              <a:rPr lang="en-US" dirty="0"/>
+              <a:t>“</a:t>
             </a:r>
             <a:r>
-              <a:rPr lang="en-US"/>
-              <a:t>Language Update</a:t>
+              <a:rPr lang="en-US" b="1" dirty="0"/>
+              <a:t>Practicing the Three Human Intelligences”</a:t>
             </a:r>
-            <a:endParaRPr lang="en-US" i="1" dirty="0"/>
+            <a:endParaRPr lang="en-IN" b="1" dirty="0"/>
           </a:p>
         </p:txBody>
       </p:sp>

--- a/_dev/Feedback/Consultant/27-Oct/10_26_2026_Update_For_Digital_Simulation.pptx
+++ b/_dev/Feedback/Consultant/27-Oct/10_26_2026_Update_For_Digital_Simulation.pptx
@@ -20345,7 +20345,7 @@
         </p:nvSpPr>
         <p:spPr>
           <a:xfrm>
-            <a:off x="9027460" y="1264023"/>
+            <a:off x="8559375" y="512909"/>
             <a:ext cx="2859741" cy="369332"/>
           </a:xfrm>
           <a:prstGeom prst="rect">
@@ -20362,8 +20362,12 @@
           <a:lstStyle/>
           <a:p>
             <a:r>
+              <a:rPr lang="en-US" b="1" dirty="0"/>
+              <a:t>Digital (27-Oct):</a:t>
+            </a:r>
+            <a:r>
               <a:rPr lang="en-US" dirty="0"/>
-              <a:t>Digital 27 Oct 2026 - Done</a:t>
+              <a:t> Done</a:t>
             </a:r>
             <a:endParaRPr lang="en-IN" dirty="0"/>
           </a:p>
@@ -20586,13 +20590,13 @@
         <p:spPr>
           <a:xfrm>
             <a:off x="7091082" y="412519"/>
-            <a:ext cx="4114802" cy="369332"/>
+            <a:ext cx="3076175" cy="369332"/>
           </a:xfrm>
           <a:prstGeom prst="rect">
             <a:avLst/>
           </a:prstGeom>
           <a:solidFill>
-            <a:srgbClr val="FFFF00"/>
+            <a:srgbClr val="FFC000"/>
           </a:solidFill>
         </p:spPr>
         <p:txBody>
@@ -20602,8 +20606,12 @@
           <a:lstStyle/>
           <a:p>
             <a:r>
+              <a:rPr lang="en-US" b="1" dirty="0"/>
+              <a:t>Digital (27-Oct):</a:t>
+            </a:r>
+            <a:r>
               <a:rPr lang="en-US" dirty="0"/>
-              <a:t>Digital 27 Oct 2026 – No updates</a:t>
+              <a:t> No updates</a:t>
             </a:r>
             <a:endParaRPr lang="en-IN" dirty="0"/>
           </a:p>
@@ -20791,10 +20799,10 @@
       </p:sp>
       <p:sp>
         <p:nvSpPr>
-          <p:cNvPr id="5" name="TextBox 4">
+          <p:cNvPr id="6" name="TextBox 5">
             <a:extLst>
               <a:ext uri="{FF2B5EF4-FFF2-40B4-BE49-F238E27FC236}">
-                <a16:creationId xmlns:a16="http://schemas.microsoft.com/office/drawing/2014/main" id="{D3B3975C-A736-0ED4-A7F6-AD7C75A30FA9}"/>
+                <a16:creationId xmlns:a16="http://schemas.microsoft.com/office/drawing/2014/main" id="{68AAD033-1C5B-96F7-7BBD-FC8A7D57411D}"/>
               </a:ext>
             </a:extLst>
           </p:cNvPr>
@@ -20804,13 +20812,13 @@
         <p:spPr>
           <a:xfrm>
             <a:off x="7091082" y="412519"/>
-            <a:ext cx="4114802" cy="369332"/>
+            <a:ext cx="3076175" cy="369332"/>
           </a:xfrm>
           <a:prstGeom prst="rect">
             <a:avLst/>
           </a:prstGeom>
           <a:solidFill>
-            <a:srgbClr val="FFFF00"/>
+            <a:srgbClr val="FFC000"/>
           </a:solidFill>
         </p:spPr>
         <p:txBody>
@@ -20820,8 +20828,12 @@
           <a:lstStyle/>
           <a:p>
             <a:r>
+              <a:rPr lang="en-US" b="1" dirty="0"/>
+              <a:t>Digital (27-Oct):</a:t>
+            </a:r>
+            <a:r>
               <a:rPr lang="en-US" dirty="0"/>
-              <a:t>Digital 27 Oct 2026 – No updates</a:t>
+              <a:t> No updates</a:t>
             </a:r>
             <a:endParaRPr lang="en-IN" dirty="0"/>
           </a:p>
@@ -21018,10 +21030,10 @@
       </p:sp>
       <p:sp>
         <p:nvSpPr>
-          <p:cNvPr id="5" name="TextBox 4">
+          <p:cNvPr id="6" name="TextBox 5">
             <a:extLst>
               <a:ext uri="{FF2B5EF4-FFF2-40B4-BE49-F238E27FC236}">
-                <a16:creationId xmlns:a16="http://schemas.microsoft.com/office/drawing/2014/main" id="{2B9DA7DD-214C-B64F-486F-B9F43A1C1D44}"/>
+                <a16:creationId xmlns:a16="http://schemas.microsoft.com/office/drawing/2014/main" id="{CACC48CC-128F-9785-BD46-16986EE9BF10}"/>
               </a:ext>
             </a:extLst>
           </p:cNvPr>
@@ -21030,7 +21042,7 @@
         </p:nvSpPr>
         <p:spPr>
           <a:xfrm>
-            <a:off x="8821272" y="381001"/>
+            <a:off x="8559375" y="512909"/>
             <a:ext cx="2859741" cy="369332"/>
           </a:xfrm>
           <a:prstGeom prst="rect">
@@ -21047,8 +21059,12 @@
           <a:lstStyle/>
           <a:p>
             <a:r>
+              <a:rPr lang="en-US" b="1" dirty="0"/>
+              <a:t>Digital (27-Oct):</a:t>
+            </a:r>
+            <a:r>
               <a:rPr lang="en-US" dirty="0"/>
-              <a:t>Digital 27 Oct 2026 - Done</a:t>
+              <a:t> Done</a:t>
             </a:r>
             <a:endParaRPr lang="en-IN" dirty="0"/>
           </a:p>
@@ -21223,10 +21239,10 @@
       </p:sp>
       <p:sp>
         <p:nvSpPr>
-          <p:cNvPr id="5" name="TextBox 4">
+          <p:cNvPr id="6" name="TextBox 5">
             <a:extLst>
               <a:ext uri="{FF2B5EF4-FFF2-40B4-BE49-F238E27FC236}">
-                <a16:creationId xmlns:a16="http://schemas.microsoft.com/office/drawing/2014/main" id="{ED5A874B-20A7-1180-480B-BC6BC43CEEF2}"/>
+                <a16:creationId xmlns:a16="http://schemas.microsoft.com/office/drawing/2014/main" id="{00DBCB71-109D-2609-F22C-2064CC4C9A08}"/>
               </a:ext>
             </a:extLst>
           </p:cNvPr>
@@ -21236,13 +21252,13 @@
         <p:spPr>
           <a:xfrm>
             <a:off x="7091082" y="412519"/>
-            <a:ext cx="4114802" cy="369332"/>
+            <a:ext cx="3076175" cy="369332"/>
           </a:xfrm>
           <a:prstGeom prst="rect">
             <a:avLst/>
           </a:prstGeom>
           <a:solidFill>
-            <a:srgbClr val="FFFF00"/>
+            <a:srgbClr val="FFC000"/>
           </a:solidFill>
         </p:spPr>
         <p:txBody>
@@ -21252,8 +21268,12 @@
           <a:lstStyle/>
           <a:p>
             <a:r>
+              <a:rPr lang="en-US" b="1" dirty="0"/>
+              <a:t>Digital (27-Oct):</a:t>
+            </a:r>
+            <a:r>
               <a:rPr lang="en-US" dirty="0"/>
-              <a:t>Digital 27 Oct 2026 – No updates</a:t>
+              <a:t> No updates</a:t>
             </a:r>
             <a:endParaRPr lang="en-IN" dirty="0"/>
           </a:p>
@@ -21438,10 +21458,10 @@
       </p:sp>
       <p:sp>
         <p:nvSpPr>
-          <p:cNvPr id="5" name="TextBox 4">
+          <p:cNvPr id="6" name="TextBox 5">
             <a:extLst>
               <a:ext uri="{FF2B5EF4-FFF2-40B4-BE49-F238E27FC236}">
-                <a16:creationId xmlns:a16="http://schemas.microsoft.com/office/drawing/2014/main" id="{75707283-DFFA-8FC5-E8D2-1307078FD003}"/>
+                <a16:creationId xmlns:a16="http://schemas.microsoft.com/office/drawing/2014/main" id="{D842E270-BB5C-7C5F-885F-1D4731374C7C}"/>
               </a:ext>
             </a:extLst>
           </p:cNvPr>
@@ -21451,13 +21471,13 @@
         <p:spPr>
           <a:xfrm>
             <a:off x="7091082" y="412519"/>
-            <a:ext cx="4114802" cy="369332"/>
+            <a:ext cx="3076175" cy="369332"/>
           </a:xfrm>
           <a:prstGeom prst="rect">
             <a:avLst/>
           </a:prstGeom>
           <a:solidFill>
-            <a:srgbClr val="FFFF00"/>
+            <a:srgbClr val="FFC000"/>
           </a:solidFill>
         </p:spPr>
         <p:txBody>
@@ -21467,8 +21487,12 @@
           <a:lstStyle/>
           <a:p>
             <a:r>
+              <a:rPr lang="en-US" b="1" dirty="0"/>
+              <a:t>Digital (27-Oct):</a:t>
+            </a:r>
+            <a:r>
               <a:rPr lang="en-US" dirty="0"/>
-              <a:t>Digital 27 Oct 2026 – No updates</a:t>
+              <a:t> No updates</a:t>
             </a:r>
             <a:endParaRPr lang="en-IN" dirty="0"/>
           </a:p>
@@ -21673,10 +21697,10 @@
       </p:sp>
       <p:sp>
         <p:nvSpPr>
-          <p:cNvPr id="5" name="TextBox 4">
+          <p:cNvPr id="6" name="TextBox 5">
             <a:extLst>
               <a:ext uri="{FF2B5EF4-FFF2-40B4-BE49-F238E27FC236}">
-                <a16:creationId xmlns:a16="http://schemas.microsoft.com/office/drawing/2014/main" id="{B15219C6-73EE-A161-638F-EB129A80D402}"/>
+                <a16:creationId xmlns:a16="http://schemas.microsoft.com/office/drawing/2014/main" id="{17FAAFB4-69AD-C488-B668-B258BDA5A768}"/>
               </a:ext>
             </a:extLst>
           </p:cNvPr>
@@ -21685,8 +21709,8 @@
         </p:nvSpPr>
         <p:spPr>
           <a:xfrm>
-            <a:off x="8650942" y="272672"/>
-            <a:ext cx="2859741" cy="1200329"/>
+            <a:off x="8360229" y="360510"/>
+            <a:ext cx="3744685" cy="1200329"/>
           </a:xfrm>
           <a:prstGeom prst="rect">
             <a:avLst/>
@@ -21702,8 +21726,22 @@
           <a:lstStyle/>
           <a:p>
             <a:r>
+              <a:rPr lang="en-US" b="1" dirty="0"/>
+              <a:t>Digital (27-Oct):</a:t>
+            </a:r>
+            <a:r>
               <a:rPr lang="en-US" dirty="0"/>
-              <a:t>Digital 27 Oct 2026 – Updated  bot title as</a:t>
+              <a:t> Done</a:t>
+            </a:r>
+          </a:p>
+          <a:p>
+            <a:r>
+              <a:rPr lang="en-US"/>
+              <a:t>Updated bot </a:t>
+            </a:r>
+            <a:r>
+              <a:rPr lang="en-US" dirty="0"/>
+              <a:t>title as</a:t>
             </a:r>
             <a:br>
               <a:rPr lang="en-US" dirty="0"/>
@@ -21716,7 +21754,7 @@
               <a:rPr lang="en-US" b="1" dirty="0"/>
               <a:t>Practicing the Three Human Intelligences”</a:t>
             </a:r>
-            <a:endParaRPr lang="en-IN" b="1" dirty="0"/>
+            <a:endParaRPr lang="en-IN" dirty="0"/>
           </a:p>
         </p:txBody>
       </p:sp>
